--- a/assets/Trial Ex Addin/CalendarTemplate.pptx
+++ b/assets/Trial Ex Addin/CalendarTemplate.pptx
@@ -136,7 +136,7 @@
   <p:extLst>
     <p:ext uri="{EFAFB233-063F-42B5-8137-9DF3F51BA10A}">
       <p15:sldGuideLst xmlns:p15="http://schemas.microsoft.com/office/powerpoint/2012/main">
-        <p15:guide id="1" orient="horz" pos="24" userDrawn="1">
+        <p15:guide id="1" orient="horz" userDrawn="1">
           <p15:clr>
             <a:srgbClr val="A4A3A4"/>
           </p15:clr>
@@ -239,7 +239,7 @@
             <a:fld id="{1DADA6F3-67E5-4475-81B7-B7D88898CC74}" type="datetimeFigureOut">
               <a:rPr lang="en-US" smtClean="0"/>
               <a:pPr/>
-              <a:t>6/30/2023</a:t>
+              <a:t>6/24/2026</a:t>
             </a:fld>
             <a:endParaRPr lang="en-US" dirty="0"/>
           </a:p>
@@ -658,7 +658,7 @@
           <a:p>
             <a:fld id="{CFB01E45-B56E-481D-B0F4-C1EC4D7715B3}" type="datetimeFigureOut">
               <a:rPr lang="en-US" smtClean="0"/>
-              <a:t>6/30/2023</a:t>
+              <a:t>6/24/2026</a:t>
             </a:fld>
             <a:endParaRPr lang="en-US"/>
           </a:p>
@@ -861,7 +861,7 @@
           <a:p>
             <a:fld id="{CFB01E45-B56E-481D-B0F4-C1EC4D7715B3}" type="datetimeFigureOut">
               <a:rPr lang="en-US" smtClean="0"/>
-              <a:t>6/30/2023</a:t>
+              <a:t>6/24/2026</a:t>
             </a:fld>
             <a:endParaRPr lang="en-US"/>
           </a:p>
@@ -1069,7 +1069,7 @@
           <a:p>
             <a:fld id="{CFB01E45-B56E-481D-B0F4-C1EC4D7715B3}" type="datetimeFigureOut">
               <a:rPr lang="en-US" smtClean="0"/>
-              <a:t>6/30/2023</a:t>
+              <a:t>6/24/2026</a:t>
             </a:fld>
             <a:endParaRPr lang="en-US"/>
           </a:p>
@@ -1267,7 +1267,7 @@
           <a:p>
             <a:fld id="{CFB01E45-B56E-481D-B0F4-C1EC4D7715B3}" type="datetimeFigureOut">
               <a:rPr lang="en-US" smtClean="0"/>
-              <a:t>6/30/2023</a:t>
+              <a:t>6/24/2026</a:t>
             </a:fld>
             <a:endParaRPr lang="en-US"/>
           </a:p>
@@ -1542,7 +1542,7 @@
           <a:p>
             <a:fld id="{CFB01E45-B56E-481D-B0F4-C1EC4D7715B3}" type="datetimeFigureOut">
               <a:rPr lang="en-US" smtClean="0"/>
-              <a:t>6/30/2023</a:t>
+              <a:t>6/24/2026</a:t>
             </a:fld>
             <a:endParaRPr lang="en-US"/>
           </a:p>
@@ -1807,7 +1807,7 @@
           <a:p>
             <a:fld id="{CFB01E45-B56E-481D-B0F4-C1EC4D7715B3}" type="datetimeFigureOut">
               <a:rPr lang="en-US" smtClean="0"/>
-              <a:t>6/30/2023</a:t>
+              <a:t>6/24/2026</a:t>
             </a:fld>
             <a:endParaRPr lang="en-US"/>
           </a:p>
@@ -2219,7 +2219,7 @@
           <a:p>
             <a:fld id="{CFB01E45-B56E-481D-B0F4-C1EC4D7715B3}" type="datetimeFigureOut">
               <a:rPr lang="en-US" smtClean="0"/>
-              <a:t>6/30/2023</a:t>
+              <a:t>6/24/2026</a:t>
             </a:fld>
             <a:endParaRPr lang="en-US"/>
           </a:p>
@@ -2360,7 +2360,7 @@
           <a:p>
             <a:fld id="{CFB01E45-B56E-481D-B0F4-C1EC4D7715B3}" type="datetimeFigureOut">
               <a:rPr lang="en-US" smtClean="0"/>
-              <a:t>6/30/2023</a:t>
+              <a:t>6/24/2026</a:t>
             </a:fld>
             <a:endParaRPr lang="en-US"/>
           </a:p>
@@ -2473,7 +2473,7 @@
           <a:p>
             <a:fld id="{CFB01E45-B56E-481D-B0F4-C1EC4D7715B3}" type="datetimeFigureOut">
               <a:rPr lang="en-US" smtClean="0"/>
-              <a:t>6/30/2023</a:t>
+              <a:t>6/24/2026</a:t>
             </a:fld>
             <a:endParaRPr lang="en-US"/>
           </a:p>
@@ -2784,7 +2784,7 @@
           <a:p>
             <a:fld id="{CFB01E45-B56E-481D-B0F4-C1EC4D7715B3}" type="datetimeFigureOut">
               <a:rPr lang="en-US" smtClean="0"/>
-              <a:t>6/30/2023</a:t>
+              <a:t>6/24/2026</a:t>
             </a:fld>
             <a:endParaRPr lang="en-US"/>
           </a:p>
@@ -3072,7 +3072,7 @@
           <a:p>
             <a:fld id="{CFB01E45-B56E-481D-B0F4-C1EC4D7715B3}" type="datetimeFigureOut">
               <a:rPr lang="en-US" smtClean="0"/>
-              <a:t>6/30/2023</a:t>
+              <a:t>6/24/2026</a:t>
             </a:fld>
             <a:endParaRPr lang="en-US"/>
           </a:p>
@@ -3332,7 +3332,7 @@
             <a:fld id="{CFB01E45-B56E-481D-B0F4-C1EC4D7715B3}" type="datetimeFigureOut">
               <a:rPr lang="en-US" smtClean="0"/>
               <a:pPr/>
-              <a:t>6/30/2023</a:t>
+              <a:t>6/24/2026</a:t>
             </a:fld>
             <a:endParaRPr lang="en-US" dirty="0"/>
           </a:p>
@@ -3762,7 +3762,7 @@
       </p:grpSpPr>
       <p:graphicFrame>
         <p:nvGraphicFramePr>
-          <p:cNvPr id="5" name="Table 5">
+          <p:cNvPr id="5" name="CalendarGrid">
             <a:extLst>
               <a:ext uri="{FF2B5EF4-FFF2-40B4-BE49-F238E27FC236}">
                 <a16:creationId xmlns:a16="http://schemas.microsoft.com/office/drawing/2014/main" id="{FEE48C83-3FEA-3B59-2F6C-53D4B4C9754B}"/>
@@ -3775,7 +3775,7 @@
           <p:nvPr>
             <p:extLst>
               <p:ext uri="{D42A27DB-BD31-4B8C-83A1-F6EECF244321}">
-                <p14:modId xmlns:p14="http://schemas.microsoft.com/office/powerpoint/2010/main" val="4178839025"/>
+                <p14:modId xmlns:p14="http://schemas.microsoft.com/office/powerpoint/2010/main" val="1496311669"/>
               </p:ext>
             </p:extLst>
           </p:nvPr>
@@ -4063,7 +4063,7 @@
                     <a:bodyPr/>
                     <a:lstStyle/>
                     <a:p>
-                      <a:endParaRPr lang="en-US" sz="1600" b="1">
+                      <a:endParaRPr lang="en-US" sz="1600" b="1" dirty="0">
                         <a:solidFill>
                           <a:schemeClr val="tx1"/>
                         </a:solidFill>
@@ -6155,6 +6155,540 @@
           </a:graphicData>
         </a:graphic>
       </p:graphicFrame>
+      <p:grpSp>
+        <p:nvGrpSpPr>
+          <p:cNvPr id="10" name="Weekbar">
+            <a:extLst>
+              <a:ext uri="{FF2B5EF4-FFF2-40B4-BE49-F238E27FC236}">
+                <a16:creationId xmlns:a16="http://schemas.microsoft.com/office/drawing/2014/main" id="{4754E570-803B-5800-D917-4EBE5B22BC88}"/>
+              </a:ext>
+            </a:extLst>
+          </p:cNvPr>
+          <p:cNvGrpSpPr/>
+          <p:nvPr/>
+        </p:nvGrpSpPr>
+        <p:grpSpPr>
+          <a:xfrm>
+            <a:off x="0" y="664052"/>
+            <a:ext cx="12192000" cy="304800"/>
+            <a:chOff x="0" y="655260"/>
+            <a:chExt cx="12268200" cy="304800"/>
+          </a:xfrm>
+          <a:solidFill>
+            <a:srgbClr val="8FAADC"/>
+          </a:solidFill>
+          <a:effectLst>
+            <a:outerShdw blurRad="50800" dist="38100" dir="2700000" algn="tl" rotWithShape="0">
+              <a:prstClr val="black">
+                <a:alpha val="40000"/>
+              </a:prstClr>
+            </a:outerShdw>
+          </a:effectLst>
+        </p:grpSpPr>
+        <p:sp>
+          <p:nvSpPr>
+            <p:cNvPr id="2" name="Day1">
+              <a:extLst>
+                <a:ext uri="{FF2B5EF4-FFF2-40B4-BE49-F238E27FC236}">
+                  <a16:creationId xmlns:a16="http://schemas.microsoft.com/office/drawing/2014/main" id="{97A8E4B7-430F-5E13-4FFF-E91C8C01F1C6}"/>
+                </a:ext>
+              </a:extLst>
+            </p:cNvPr>
+            <p:cNvSpPr/>
+            <p:nvPr/>
+          </p:nvSpPr>
+          <p:spPr>
+            <a:xfrm>
+              <a:off x="0" y="655260"/>
+              <a:ext cx="1752600" cy="304800"/>
+            </a:xfrm>
+            <a:prstGeom prst="rect">
+              <a:avLst/>
+            </a:prstGeom>
+            <a:grpFill/>
+            <a:ln>
+              <a:noFill/>
+            </a:ln>
+          </p:spPr>
+          <p:style>
+            <a:lnRef idx="2">
+              <a:schemeClr val="accent1">
+                <a:shade val="15000"/>
+              </a:schemeClr>
+            </a:lnRef>
+            <a:fillRef idx="1">
+              <a:schemeClr val="accent1"/>
+            </a:fillRef>
+            <a:effectRef idx="0">
+              <a:schemeClr val="accent1"/>
+            </a:effectRef>
+            <a:fontRef idx="minor">
+              <a:schemeClr val="lt1"/>
+            </a:fontRef>
+          </p:style>
+          <p:txBody>
+            <a:bodyPr rtlCol="0" anchor="ctr"/>
+            <a:lstStyle/>
+            <a:p>
+              <a:pPr algn="ctr"/>
+              <a:r>
+                <a:rPr lang="en-US" sz="1400" b="1" dirty="0">
+                  <a:effectLst>
+                    <a:outerShdw blurRad="38100" dist="38100" dir="2700000" algn="tl">
+                      <a:srgbClr val="000000">
+                        <a:alpha val="43137"/>
+                      </a:srgbClr>
+                    </a:outerShdw>
+                  </a:effectLst>
+                  <a:latin typeface="Arial" panose="020B0604020202020204" pitchFamily="34" charset="0"/>
+                  <a:cs typeface="Arial" panose="020B0604020202020204" pitchFamily="34" charset="0"/>
+                </a:rPr>
+                <a:t>DAY 1</a:t>
+              </a:r>
+            </a:p>
+          </p:txBody>
+        </p:sp>
+        <p:sp>
+          <p:nvSpPr>
+            <p:cNvPr id="3" name="Day2">
+              <a:extLst>
+                <a:ext uri="{FF2B5EF4-FFF2-40B4-BE49-F238E27FC236}">
+                  <a16:creationId xmlns:a16="http://schemas.microsoft.com/office/drawing/2014/main" id="{1BDA7398-23AF-84D8-53CD-0890F573645B}"/>
+                </a:ext>
+              </a:extLst>
+            </p:cNvPr>
+            <p:cNvSpPr/>
+            <p:nvPr/>
+          </p:nvSpPr>
+          <p:spPr>
+            <a:xfrm>
+              <a:off x="1752600" y="655260"/>
+              <a:ext cx="1752600" cy="304800"/>
+            </a:xfrm>
+            <a:prstGeom prst="rect">
+              <a:avLst/>
+            </a:prstGeom>
+            <a:grpFill/>
+            <a:ln>
+              <a:noFill/>
+            </a:ln>
+          </p:spPr>
+          <p:style>
+            <a:lnRef idx="2">
+              <a:schemeClr val="accent1">
+                <a:shade val="15000"/>
+              </a:schemeClr>
+            </a:lnRef>
+            <a:fillRef idx="1">
+              <a:schemeClr val="accent1"/>
+            </a:fillRef>
+            <a:effectRef idx="0">
+              <a:schemeClr val="accent1"/>
+            </a:effectRef>
+            <a:fontRef idx="minor">
+              <a:schemeClr val="lt1"/>
+            </a:fontRef>
+          </p:style>
+          <p:txBody>
+            <a:bodyPr rtlCol="0" anchor="ctr"/>
+            <a:lstStyle/>
+            <a:p>
+              <a:pPr algn="ctr"/>
+              <a:r>
+                <a:rPr lang="en-US" sz="1400" b="1" dirty="0">
+                  <a:effectLst>
+                    <a:outerShdw blurRad="38100" dist="38100" dir="2700000" algn="tl">
+                      <a:srgbClr val="000000">
+                        <a:alpha val="43137"/>
+                      </a:srgbClr>
+                    </a:outerShdw>
+                  </a:effectLst>
+                  <a:latin typeface="Arial" panose="020B0604020202020204" pitchFamily="34" charset="0"/>
+                  <a:cs typeface="Arial" panose="020B0604020202020204" pitchFamily="34" charset="0"/>
+                </a:rPr>
+                <a:t>DAY 2</a:t>
+              </a:r>
+            </a:p>
+          </p:txBody>
+        </p:sp>
+        <p:sp>
+          <p:nvSpPr>
+            <p:cNvPr id="4" name="Day3">
+              <a:extLst>
+                <a:ext uri="{FF2B5EF4-FFF2-40B4-BE49-F238E27FC236}">
+                  <a16:creationId xmlns:a16="http://schemas.microsoft.com/office/drawing/2014/main" id="{6A28A780-7128-EC98-E850-3DCAF6DEA07F}"/>
+                </a:ext>
+              </a:extLst>
+            </p:cNvPr>
+            <p:cNvSpPr/>
+            <p:nvPr/>
+          </p:nvSpPr>
+          <p:spPr>
+            <a:xfrm>
+              <a:off x="3505200" y="655260"/>
+              <a:ext cx="1752600" cy="304800"/>
+            </a:xfrm>
+            <a:prstGeom prst="rect">
+              <a:avLst/>
+            </a:prstGeom>
+            <a:grpFill/>
+            <a:ln>
+              <a:noFill/>
+            </a:ln>
+          </p:spPr>
+          <p:style>
+            <a:lnRef idx="2">
+              <a:schemeClr val="accent1">
+                <a:shade val="15000"/>
+              </a:schemeClr>
+            </a:lnRef>
+            <a:fillRef idx="1">
+              <a:schemeClr val="accent1"/>
+            </a:fillRef>
+            <a:effectRef idx="0">
+              <a:schemeClr val="accent1"/>
+            </a:effectRef>
+            <a:fontRef idx="minor">
+              <a:schemeClr val="lt1"/>
+            </a:fontRef>
+          </p:style>
+          <p:txBody>
+            <a:bodyPr rtlCol="0" anchor="ctr"/>
+            <a:lstStyle/>
+            <a:p>
+              <a:pPr algn="ctr"/>
+              <a:r>
+                <a:rPr lang="en-US" sz="1400" b="1" dirty="0">
+                  <a:effectLst>
+                    <a:outerShdw blurRad="38100" dist="38100" dir="2700000" algn="tl">
+                      <a:srgbClr val="000000">
+                        <a:alpha val="43137"/>
+                      </a:srgbClr>
+                    </a:outerShdw>
+                  </a:effectLst>
+                  <a:latin typeface="Arial" panose="020B0604020202020204" pitchFamily="34" charset="0"/>
+                  <a:cs typeface="Arial" panose="020B0604020202020204" pitchFamily="34" charset="0"/>
+                </a:rPr>
+                <a:t>DAY 3</a:t>
+              </a:r>
+            </a:p>
+          </p:txBody>
+        </p:sp>
+        <p:sp>
+          <p:nvSpPr>
+            <p:cNvPr id="6" name="Day4">
+              <a:extLst>
+                <a:ext uri="{FF2B5EF4-FFF2-40B4-BE49-F238E27FC236}">
+                  <a16:creationId xmlns:a16="http://schemas.microsoft.com/office/drawing/2014/main" id="{0C641677-4258-032B-6D56-B723F9484F9D}"/>
+                </a:ext>
+              </a:extLst>
+            </p:cNvPr>
+            <p:cNvSpPr/>
+            <p:nvPr/>
+          </p:nvSpPr>
+          <p:spPr>
+            <a:xfrm>
+              <a:off x="5257800" y="655260"/>
+              <a:ext cx="1752600" cy="304800"/>
+            </a:xfrm>
+            <a:prstGeom prst="rect">
+              <a:avLst/>
+            </a:prstGeom>
+            <a:grpFill/>
+            <a:ln>
+              <a:noFill/>
+            </a:ln>
+          </p:spPr>
+          <p:style>
+            <a:lnRef idx="2">
+              <a:schemeClr val="accent1">
+                <a:shade val="15000"/>
+              </a:schemeClr>
+            </a:lnRef>
+            <a:fillRef idx="1">
+              <a:schemeClr val="accent1"/>
+            </a:fillRef>
+            <a:effectRef idx="0">
+              <a:schemeClr val="accent1"/>
+            </a:effectRef>
+            <a:fontRef idx="minor">
+              <a:schemeClr val="lt1"/>
+            </a:fontRef>
+          </p:style>
+          <p:txBody>
+            <a:bodyPr rtlCol="0" anchor="ctr"/>
+            <a:lstStyle/>
+            <a:p>
+              <a:pPr algn="ctr"/>
+              <a:r>
+                <a:rPr lang="en-US" sz="1400" b="1" dirty="0">
+                  <a:effectLst>
+                    <a:outerShdw blurRad="38100" dist="38100" dir="2700000" algn="tl">
+                      <a:srgbClr val="000000">
+                        <a:alpha val="43137"/>
+                      </a:srgbClr>
+                    </a:outerShdw>
+                  </a:effectLst>
+                  <a:latin typeface="Arial" panose="020B0604020202020204" pitchFamily="34" charset="0"/>
+                  <a:cs typeface="Arial" panose="020B0604020202020204" pitchFamily="34" charset="0"/>
+                </a:rPr>
+                <a:t>DAY 4</a:t>
+              </a:r>
+            </a:p>
+          </p:txBody>
+        </p:sp>
+        <p:sp>
+          <p:nvSpPr>
+            <p:cNvPr id="7" name="Day5">
+              <a:extLst>
+                <a:ext uri="{FF2B5EF4-FFF2-40B4-BE49-F238E27FC236}">
+                  <a16:creationId xmlns:a16="http://schemas.microsoft.com/office/drawing/2014/main" id="{954A427E-D47B-2121-F360-920ADE5B5277}"/>
+                </a:ext>
+              </a:extLst>
+            </p:cNvPr>
+            <p:cNvSpPr/>
+            <p:nvPr/>
+          </p:nvSpPr>
+          <p:spPr>
+            <a:xfrm>
+              <a:off x="7010400" y="655260"/>
+              <a:ext cx="1752600" cy="304800"/>
+            </a:xfrm>
+            <a:prstGeom prst="rect">
+              <a:avLst/>
+            </a:prstGeom>
+            <a:grpFill/>
+            <a:ln>
+              <a:noFill/>
+            </a:ln>
+          </p:spPr>
+          <p:style>
+            <a:lnRef idx="2">
+              <a:schemeClr val="accent1">
+                <a:shade val="15000"/>
+              </a:schemeClr>
+            </a:lnRef>
+            <a:fillRef idx="1">
+              <a:schemeClr val="accent1"/>
+            </a:fillRef>
+            <a:effectRef idx="0">
+              <a:schemeClr val="accent1"/>
+            </a:effectRef>
+            <a:fontRef idx="minor">
+              <a:schemeClr val="lt1"/>
+            </a:fontRef>
+          </p:style>
+          <p:txBody>
+            <a:bodyPr rtlCol="0" anchor="ctr"/>
+            <a:lstStyle/>
+            <a:p>
+              <a:pPr algn="ctr"/>
+              <a:r>
+                <a:rPr lang="en-US" sz="1400" b="1" dirty="0">
+                  <a:effectLst>
+                    <a:outerShdw blurRad="38100" dist="38100" dir="2700000" algn="tl">
+                      <a:srgbClr val="000000">
+                        <a:alpha val="43137"/>
+                      </a:srgbClr>
+                    </a:outerShdw>
+                  </a:effectLst>
+                  <a:latin typeface="Arial" panose="020B0604020202020204" pitchFamily="34" charset="0"/>
+                  <a:cs typeface="Arial" panose="020B0604020202020204" pitchFamily="34" charset="0"/>
+                </a:rPr>
+                <a:t>DAY 5</a:t>
+              </a:r>
+            </a:p>
+          </p:txBody>
+        </p:sp>
+        <p:sp>
+          <p:nvSpPr>
+            <p:cNvPr id="8" name="Day6">
+              <a:extLst>
+                <a:ext uri="{FF2B5EF4-FFF2-40B4-BE49-F238E27FC236}">
+                  <a16:creationId xmlns:a16="http://schemas.microsoft.com/office/drawing/2014/main" id="{0F97AB2C-4673-89E2-C698-6E7A6AF011FC}"/>
+                </a:ext>
+              </a:extLst>
+            </p:cNvPr>
+            <p:cNvSpPr/>
+            <p:nvPr/>
+          </p:nvSpPr>
+          <p:spPr>
+            <a:xfrm>
+              <a:off x="8763000" y="655260"/>
+              <a:ext cx="1752600" cy="304800"/>
+            </a:xfrm>
+            <a:prstGeom prst="rect">
+              <a:avLst/>
+            </a:prstGeom>
+            <a:grpFill/>
+            <a:ln>
+              <a:noFill/>
+            </a:ln>
+          </p:spPr>
+          <p:style>
+            <a:lnRef idx="2">
+              <a:schemeClr val="accent1">
+                <a:shade val="15000"/>
+              </a:schemeClr>
+            </a:lnRef>
+            <a:fillRef idx="1">
+              <a:schemeClr val="accent1"/>
+            </a:fillRef>
+            <a:effectRef idx="0">
+              <a:schemeClr val="accent1"/>
+            </a:effectRef>
+            <a:fontRef idx="minor">
+              <a:schemeClr val="lt1"/>
+            </a:fontRef>
+          </p:style>
+          <p:txBody>
+            <a:bodyPr rtlCol="0" anchor="ctr"/>
+            <a:lstStyle/>
+            <a:p>
+              <a:pPr algn="ctr"/>
+              <a:r>
+                <a:rPr lang="en-US" sz="1400" b="1" dirty="0">
+                  <a:effectLst>
+                    <a:outerShdw blurRad="38100" dist="38100" dir="2700000" algn="tl">
+                      <a:srgbClr val="000000">
+                        <a:alpha val="43137"/>
+                      </a:srgbClr>
+                    </a:outerShdw>
+                  </a:effectLst>
+                  <a:latin typeface="Arial" panose="020B0604020202020204" pitchFamily="34" charset="0"/>
+                  <a:cs typeface="Arial" panose="020B0604020202020204" pitchFamily="34" charset="0"/>
+                </a:rPr>
+                <a:t>DAY 6</a:t>
+              </a:r>
+            </a:p>
+          </p:txBody>
+        </p:sp>
+        <p:sp>
+          <p:nvSpPr>
+            <p:cNvPr id="9" name="Day7">
+              <a:extLst>
+                <a:ext uri="{FF2B5EF4-FFF2-40B4-BE49-F238E27FC236}">
+                  <a16:creationId xmlns:a16="http://schemas.microsoft.com/office/drawing/2014/main" id="{34366F67-199B-9DBC-ADB6-760B0B95FED4}"/>
+                </a:ext>
+              </a:extLst>
+            </p:cNvPr>
+            <p:cNvSpPr/>
+            <p:nvPr/>
+          </p:nvSpPr>
+          <p:spPr>
+            <a:xfrm>
+              <a:off x="10515600" y="655260"/>
+              <a:ext cx="1752600" cy="304800"/>
+            </a:xfrm>
+            <a:prstGeom prst="rect">
+              <a:avLst/>
+            </a:prstGeom>
+            <a:grpFill/>
+            <a:ln>
+              <a:noFill/>
+            </a:ln>
+          </p:spPr>
+          <p:style>
+            <a:lnRef idx="2">
+              <a:schemeClr val="accent1">
+                <a:shade val="15000"/>
+              </a:schemeClr>
+            </a:lnRef>
+            <a:fillRef idx="1">
+              <a:schemeClr val="accent1"/>
+            </a:fillRef>
+            <a:effectRef idx="0">
+              <a:schemeClr val="accent1"/>
+            </a:effectRef>
+            <a:fontRef idx="minor">
+              <a:schemeClr val="lt1"/>
+            </a:fontRef>
+          </p:style>
+          <p:txBody>
+            <a:bodyPr rtlCol="0" anchor="ctr"/>
+            <a:lstStyle/>
+            <a:p>
+              <a:pPr algn="ctr"/>
+              <a:r>
+                <a:rPr lang="en-US" sz="1400" b="1" dirty="0">
+                  <a:effectLst>
+                    <a:outerShdw blurRad="38100" dist="38100" dir="2700000" algn="tl">
+                      <a:srgbClr val="000000">
+                        <a:alpha val="43137"/>
+                      </a:srgbClr>
+                    </a:outerShdw>
+                  </a:effectLst>
+                  <a:latin typeface="Arial" panose="020B0604020202020204" pitchFamily="34" charset="0"/>
+                  <a:cs typeface="Arial" panose="020B0604020202020204" pitchFamily="34" charset="0"/>
+                </a:rPr>
+                <a:t>DAY 7</a:t>
+              </a:r>
+            </a:p>
+          </p:txBody>
+        </p:sp>
+      </p:grpSp>
+      <p:sp>
+        <p:nvSpPr>
+          <p:cNvPr id="19" name="MonthTitle">
+            <a:extLst>
+              <a:ext uri="{FF2B5EF4-FFF2-40B4-BE49-F238E27FC236}">
+                <a16:creationId xmlns:a16="http://schemas.microsoft.com/office/drawing/2014/main" id="{775E46A1-692E-BFB3-9932-1B0BD3F3D523}"/>
+              </a:ext>
+            </a:extLst>
+          </p:cNvPr>
+          <p:cNvSpPr/>
+          <p:nvPr/>
+        </p:nvSpPr>
+        <p:spPr>
+          <a:xfrm>
+            <a:off x="0" y="0"/>
+            <a:ext cx="12191998" cy="655260"/>
+          </a:xfrm>
+          <a:prstGeom prst="rect">
+            <a:avLst/>
+          </a:prstGeom>
+          <a:solidFill>
+            <a:srgbClr val="002060"/>
+          </a:solidFill>
+        </p:spPr>
+        <p:style>
+          <a:lnRef idx="2">
+            <a:schemeClr val="accent1">
+              <a:shade val="15000"/>
+            </a:schemeClr>
+          </a:lnRef>
+          <a:fillRef idx="1">
+            <a:schemeClr val="accent1"/>
+          </a:fillRef>
+          <a:effectRef idx="0">
+            <a:schemeClr val="accent1"/>
+          </a:effectRef>
+          <a:fontRef idx="minor">
+            <a:schemeClr val="lt1"/>
+          </a:fontRef>
+        </p:style>
+        <p:txBody>
+          <a:bodyPr rtlCol="0" anchor="ctr"/>
+          <a:lstStyle/>
+          <a:p>
+            <a:pPr algn="ctr"/>
+            <a:r>
+              <a:rPr lang="en-US" sz="3200" b="1" dirty="0">
+                <a:effectLst>
+                  <a:outerShdw blurRad="38100" dist="38100" dir="2700000" algn="tl">
+                    <a:srgbClr val="000000">
+                      <a:alpha val="43137"/>
+                    </a:srgbClr>
+                  </a:outerShdw>
+                </a:effectLst>
+                <a:latin typeface="Arial" panose="020B0604020202020204" pitchFamily="34" charset="0"/>
+                <a:cs typeface="Arial" panose="020B0604020202020204" pitchFamily="34" charset="0"/>
+              </a:rPr>
+              <a:t>Month 2099</a:t>
+            </a:r>
+          </a:p>
+        </p:txBody>
+      </p:sp>
     </p:spTree>
     <p:custDataLst>
       <p:tags r:id="rId1"/>
